--- a/deck/ChurnZero_RetainIQ_Presentation.pptx
+++ b/deck/ChurnZero_RetainIQ_Presentation.pptx
@@ -3307,7 +3307,7 @@
           <a:lstStyle/>
           <a:p>
             <a:r>
-              <a:t>Customer 138223 · segment: persuadable</a:t>
+              <a:t>Customer 140348 · segment: persuadable</a:t>
             </a:r>
           </a:p>
           <a:p>
@@ -3315,7 +3315,7 @@
               <a:defRPr sz="1800"/>
             </a:pPr>
             <a:r>
-              <a:t>P(churn) = 0.001 · CATE = +0.953</a:t>
+              <a:t>P(churn) = 0.959 · CATE = +0.351</a:t>
             </a:r>
           </a:p>
           <a:p>
@@ -3323,7 +3323,7 @@
               <a:defRPr sz="1800"/>
             </a:pPr>
             <a:r>
-              <a:t>Uplift CATE = +0.953: offer strongly associated with staying for this profile.</a:t>
+              <a:t>High uplift in persuadable band (CATE + risk), not mass blast</a:t>
             </a:r>
           </a:p>
           <a:p>
@@ -3331,7 +3331,7 @@
               <a:defRPr sz="1800"/>
             </a:pPr>
             <a:r>
-              <a:t>Portfolio churn score = 0.001; segment = persuadable (offer helps).</a:t>
+              <a:t>Uplift CATE = +0.351: offer strongly associated with staying for this profile.</a:t>
             </a:r>
           </a:p>
           <a:p>
@@ -3966,14 +3966,6 @@
               <a:t>IPTW uplift · fairness (gender, region)</a:t>
             </a:r>
           </a:p>
-          <a:p>
-            <a:pPr>
-              <a:defRPr sz="1800"/>
-            </a:pPr>
-            <a:r>
-              <a:t>Validated: pytest + CAUSAL_FIXES audit</a:t>
-            </a:r>
-          </a:p>
         </p:txBody>
       </p:sp>
     </p:spTree>
@@ -4031,7 +4023,7 @@
           <a:lstStyle/>
           <a:p>
             <a:r>
-              <a:t>Logistic → LGB → stack → calibrated: PR-AUC ≈ 0.99</a:t>
+              <a:t>Logistic → LGB → stack → calibrated: PR-AUC ≈ 0.9999</a:t>
             </a:r>
           </a:p>
           <a:p>
@@ -4047,7 +4039,7 @@
               <a:defRPr sz="1800"/>
             </a:pPr>
             <a:r>
-              <a:t>We win on the decision layer: threshold + uplift</a:t>
+              <a:t>Where we win: cost-optimal cutoff + uplift + playbook</a:t>
             </a:r>
           </a:p>
         </p:txBody>

--- a/deck/ChurnZero_RetainIQ_Presentation.pptx
+++ b/deck/ChurnZero_RetainIQ_Presentation.pptx
@@ -3591,7 +3591,7 @@
               <a:defRPr sz="1800"/>
             </a:pPr>
             <a:r>
-              <a:t>Limits: observational uplift, saturated AUC</a:t>
+              <a:t>Limits: observational uplift, PR-AUC ~1.0 on this dataset</a:t>
             </a:r>
           </a:p>
         </p:txBody>
@@ -4002,7 +4002,7 @@
           <a:lstStyle/>
           <a:p>
             <a:r>
-              <a:t>Model journey (PR-AUC saturated)</a:t>
+              <a:t>Model scores plateau — cutoff still matters</a:t>
             </a:r>
           </a:p>
         </p:txBody>
